--- a/Foundation_F6/Guided_Practice/F6-L10_Practice_Room_Listening_Town_and_Transport_Texts.pptx
+++ b/Foundation_F6/Guided_Practice/F6-L10_Practice_Room_Listening_Town_and_Transport_Texts.pptx
@@ -12166,11 +12166,11 @@
           <a:bodyPr wrap="square" lIns="0" tIns="0" rIns="0" bIns="0" rtlCol="0" anchor="ctr"/>
           <a:lstStyle/>
           <a:p>
-            <a:pPr algn="l" indent="0" marL="0">
-              <a:buNone/>
-            </a:pPr>
-            <a:r>
-              <a:rPr lang="ar-SA" altLang="en-US" sz="3900" b="1" dirty="0">
+            <a:pPr rtl="1" algn="r" indent="0" marL="0">
+              <a:buNone/>
+            </a:pPr>
+            <a:r>
+              <a:rPr lang="ar-SA" altLang="en-US" sz="3000" b="1" dirty="0">
                 <a:solidFill>
                   <a:srgbClr val="B83227"/>
                 </a:solidFill>
@@ -12178,49 +12178,9 @@
                 <a:ea typeface="Amiri" pitchFamily="2" charset="-78"/>
                 <a:cs typeface="Amiri" pitchFamily="2" charset="-78"/>
               </a:rPr>
-              <a:t>كَمْ ثَمَنُ التَّذْكِرَةِ المُفْرَدَةِ؟</a:t>
-            </a:r>
-            <a:pPr algn="l" indent="0" marL="0">
-              <a:buNone/>
-            </a:pPr>
-            <a:r>
-              <a:rPr lang="en-US" sz="3000" b="1" dirty="0">
-                <a:solidFill>
-                  <a:srgbClr val="B83227"/>
-                </a:solidFill>
-                <a:latin typeface="Calibri" pitchFamily="34" charset="0"/>
-                <a:cs typeface="Amiri" pitchFamily="2" charset="-78"/>
-              </a:rPr>
-              <a:t> — </a:t>
-            </a:r>
-            <a:pPr algn="l" indent="0" marL="0">
-              <a:buNone/>
-            </a:pPr>
-            <a:r>
-              <a:rPr lang="ar-SA" altLang="en-US" sz="3900" b="1" dirty="0">
-                <a:solidFill>
-                  <a:srgbClr val="B83227"/>
-                </a:solidFill>
-                <a:latin typeface="Amiri" pitchFamily="2" charset="-78"/>
-                <a:ea typeface="Amiri" pitchFamily="2" charset="-78"/>
-                <a:cs typeface="Amiri" pitchFamily="2" charset="-78"/>
-              </a:rPr>
-              <a:t>عِشْرُونَ</a:t>
-            </a:r>
-            <a:pPr algn="l" indent="0" marL="0">
-              <a:buNone/>
-            </a:pPr>
-            <a:r>
-              <a:rPr lang="en-US" sz="3000" b="1" dirty="0">
-                <a:solidFill>
-                  <a:srgbClr val="B83227"/>
-                </a:solidFill>
-                <a:latin typeface="Calibri" pitchFamily="34" charset="0"/>
-                <a:cs typeface="Amiri" pitchFamily="2" charset="-78"/>
-              </a:rPr>
-              <a:t>. (from announcement 4)</a:t>
-            </a:r>
-            <a:endParaRPr lang="en-US" sz="3000" dirty="0"/>
+              <a:t>كَمْ ثَمَنُ التَّذْكِرَةِ المُفْرَدَةِ؟ — عِشْرُونَ.</a:t>
+            </a:r>
+            <a:endParaRPr lang="ar-SA" sz="3000" dirty="0"/>
           </a:p>
         </p:txBody>
       </p:sp>
@@ -12256,7 +12216,7 @@
                 <a:latin typeface="Calibri" pitchFamily="34" charset="0"/>
                 <a:cs typeface="Amiri" pitchFamily="2" charset="-78"/>
               </a:rPr>
-              <a:t>Listen after </a:t>
+              <a:t>From announcement 4 — Listen after </a:t>
             </a:r>
             <a:pPr algn="l" indent="0" marL="0">
               <a:buNone/>
@@ -12407,11 +12367,11 @@
           <a:bodyPr wrap="square" lIns="0" tIns="0" rIns="0" bIns="0" rtlCol="0" anchor="ctr"/>
           <a:lstStyle/>
           <a:p>
-            <a:pPr algn="l" indent="0" marL="0">
-              <a:buNone/>
-            </a:pPr>
-            <a:r>
-              <a:rPr lang="ar-SA" altLang="en-US" sz="3900" b="1" dirty="0">
+            <a:pPr rtl="1" algn="r" indent="0" marL="0">
+              <a:buNone/>
+            </a:pPr>
+            <a:r>
+              <a:rPr lang="ar-SA" altLang="en-US" sz="3000" b="1" dirty="0">
                 <a:solidFill>
                   <a:srgbClr val="B83227"/>
                 </a:solidFill>
@@ -12419,28 +12379,53 @@
                 <a:ea typeface="Amiri" pitchFamily="2" charset="-78"/>
                 <a:cs typeface="Amiri" pitchFamily="2" charset="-78"/>
               </a:rPr>
-              <a:t>القِطَارُ يُغَادِرُ مِنَ الرَّصِيفِ رَقْمِ وَاحِدٍ</a:t>
-            </a:r>
+              <a:t>القِطَارُ يُغَادِرُ مِنَ الرَّصِيفِ رَقْمِ وَاحِدٍ.</a:t>
+            </a:r>
+            <a:endParaRPr lang="ar-SA" sz="3000" dirty="0"/>
+          </a:p>
+        </p:txBody>
+      </p:sp>
+      <p:sp>
+        <p:nvSpPr>
+          <p:cNvPr id="29" name="Text 26"/>
+          <p:cNvSpPr txBox="1"/>
+          <p:nvPr/>
+        </p:nvSpPr>
+        <p:spPr>
+          <a:xfrm>
+            <a:off x="731520" y="4791456"/>
+            <a:ext cx="3200400" cy="1097280"/>
+          </a:xfrm>
+          <a:prstGeom prst="rect">
+            <a:avLst/>
+          </a:prstGeom>
+          <a:noFill/>
+          <a:ln/>
+        </p:spPr>
+        <p:txBody>
+          <a:bodyPr wrap="square" lIns="0" tIns="0" rIns="0" bIns="0" rtlCol="0" anchor="ctr"/>
+          <a:lstStyle/>
+          <a:p>
             <a:pPr algn="l" indent="0" marL="0">
               <a:buNone/>
             </a:pPr>
             <a:r>
-              <a:rPr lang="en-US" sz="3000" b="1" dirty="0">
-                <a:solidFill>
-                  <a:srgbClr val="B83227"/>
-                </a:solidFill>
-                <a:latin typeface="Calibri" pitchFamily="34" charset="0"/>
-                <a:cs typeface="Amiri" pitchFamily="2" charset="-78"/>
-              </a:rPr>
-              <a:t>. (heard: </a:t>
+              <a:rPr lang="en-US" sz="1300" i="1" dirty="0">
+                <a:solidFill>
+                  <a:srgbClr val="5A6472"/>
+                </a:solidFill>
+                <a:latin typeface="Calibri" pitchFamily="34" charset="0"/>
+                <a:cs typeface="Amiri" pitchFamily="2" charset="-78"/>
+              </a:rPr>
+              <a:t>Heard: </a:t>
             </a:r>
             <a:pPr algn="l" indent="0" marL="0">
               <a:buNone/>
             </a:pPr>
             <a:r>
-              <a:rPr lang="ar-SA" altLang="en-US" sz="3900" b="1" dirty="0">
-                <a:solidFill>
-                  <a:srgbClr val="B83227"/>
+              <a:rPr lang="ar-SA" altLang="en-US" sz="1700" dirty="0">
+                <a:solidFill>
+                  <a:srgbClr val="5A6472"/>
                 </a:solidFill>
                 <a:latin typeface="Amiri" pitchFamily="2" charset="-78"/>
                 <a:ea typeface="Amiri" pitchFamily="2" charset="-78"/>
@@ -12452,40 +12437,15 @@
               <a:buNone/>
             </a:pPr>
             <a:r>
-              <a:rPr lang="en-US" sz="3000" b="1" dirty="0">
-                <a:solidFill>
-                  <a:srgbClr val="B83227"/>
-                </a:solidFill>
-                <a:latin typeface="Calibri" pitchFamily="34" charset="0"/>
-                <a:cs typeface="Amiri" pitchFamily="2" charset="-78"/>
-              </a:rPr>
-              <a:t>)</a:t>
-            </a:r>
-            <a:endParaRPr lang="en-US" sz="3000" dirty="0"/>
-          </a:p>
-        </p:txBody>
-      </p:sp>
-      <p:sp>
-        <p:nvSpPr>
-          <p:cNvPr id="29" name="Text 26"/>
-          <p:cNvSpPr txBox="1"/>
-          <p:nvPr/>
-        </p:nvSpPr>
-        <p:spPr>
-          <a:xfrm>
-            <a:off x="731520" y="4791456"/>
-            <a:ext cx="3200400" cy="1097280"/>
-          </a:xfrm>
-          <a:prstGeom prst="rect">
-            <a:avLst/>
-          </a:prstGeom>
-          <a:noFill/>
-          <a:ln/>
-        </p:spPr>
-        <p:txBody>
-          <a:bodyPr wrap="square" lIns="0" tIns="0" rIns="0" bIns="0" rtlCol="0" anchor="ctr"/>
-          <a:lstStyle/>
-          <a:p>
+              <a:rPr lang="en-US" sz="1300" i="1" dirty="0">
+                <a:solidFill>
+                  <a:srgbClr val="5A6472"/>
+                </a:solidFill>
+                <a:latin typeface="Calibri" pitchFamily="34" charset="0"/>
+                <a:cs typeface="Amiri" pitchFamily="2" charset="-78"/>
+              </a:rPr>
+              <a:t> — </a:t>
+            </a:r>
             <a:pPr algn="l" indent="0" marL="0">
               <a:buNone/>
             </a:pPr>
@@ -13293,11 +13253,11 @@
           <a:bodyPr wrap="square" lIns="0" tIns="0" rIns="0" bIns="0" rtlCol="0" anchor="ctr"/>
           <a:lstStyle/>
           <a:p>
-            <a:pPr algn="l" indent="0" marL="0">
-              <a:buNone/>
-            </a:pPr>
-            <a:r>
-              <a:rPr lang="ar-SA" altLang="en-US" sz="2350" dirty="0">
+            <a:pPr rtl="1" algn="r" indent="0" marL="0">
+              <a:buNone/>
+            </a:pPr>
+            <a:r>
+              <a:rPr lang="ar-SA" altLang="en-US" sz="1800" b="1" dirty="0">
                 <a:solidFill>
                   <a:srgbClr val="B83227"/>
                 </a:solidFill>
@@ -13305,49 +13265,9 @@
                 <a:ea typeface="Amiri" pitchFamily="2" charset="-78"/>
                 <a:cs typeface="Amiri" pitchFamily="2" charset="-78"/>
               </a:rPr>
-              <a:t>كَمْ ثَمَنُ التَّذْكِرَةِ المُفْرَدَةِ؟</a:t>
-            </a:r>
-            <a:pPr algn="l" indent="0" marL="0">
-              <a:buNone/>
-            </a:pPr>
-            <a:r>
-              <a:rPr lang="en-US" sz="1800" dirty="0">
-                <a:solidFill>
-                  <a:srgbClr val="B83227"/>
-                </a:solidFill>
-                <a:latin typeface="Calibri" pitchFamily="34" charset="0"/>
-                <a:cs typeface="Amiri" pitchFamily="2" charset="-78"/>
-              </a:rPr>
-              <a:t> — </a:t>
-            </a:r>
-            <a:pPr algn="l" indent="0" marL="0">
-              <a:buNone/>
-            </a:pPr>
-            <a:r>
-              <a:rPr lang="ar-SA" altLang="en-US" sz="2350" dirty="0">
-                <a:solidFill>
-                  <a:srgbClr val="B83227"/>
-                </a:solidFill>
-                <a:latin typeface="Amiri" pitchFamily="2" charset="-78"/>
-                <a:ea typeface="Amiri" pitchFamily="2" charset="-78"/>
-                <a:cs typeface="Amiri" pitchFamily="2" charset="-78"/>
-              </a:rPr>
-              <a:t>عِشْرُونَ</a:t>
-            </a:r>
-            <a:pPr algn="l" indent="0" marL="0">
-              <a:buNone/>
-            </a:pPr>
-            <a:r>
-              <a:rPr lang="en-US" sz="1800" dirty="0">
-                <a:solidFill>
-                  <a:srgbClr val="B83227"/>
-                </a:solidFill>
-                <a:latin typeface="Calibri" pitchFamily="34" charset="0"/>
-                <a:cs typeface="Amiri" pitchFamily="2" charset="-78"/>
-              </a:rPr>
-              <a:t>. (from announcement 4)</a:t>
-            </a:r>
-            <a:endParaRPr lang="en-US" sz="1800" dirty="0"/>
+              <a:t>كَمْ ثَمَنُ التَّذْكِرَةِ المُفْرَدَةِ؟ — عِشْرُونَ.</a:t>
+            </a:r>
+            <a:endParaRPr lang="ar-SA" sz="1800" dirty="0"/>
           </a:p>
         </p:txBody>
       </p:sp>
@@ -13571,11 +13491,11 @@
           <a:bodyPr wrap="square" lIns="0" tIns="0" rIns="0" bIns="0" rtlCol="0" anchor="ctr"/>
           <a:lstStyle/>
           <a:p>
-            <a:pPr algn="l" indent="0" marL="0">
-              <a:buNone/>
-            </a:pPr>
-            <a:r>
-              <a:rPr lang="ar-SA" altLang="en-US" sz="2300" dirty="0">
+            <a:pPr rtl="1" algn="r" indent="0" marL="0">
+              <a:buNone/>
+            </a:pPr>
+            <a:r>
+              <a:rPr lang="ar-SA" altLang="en-US" sz="1800" b="1" dirty="0">
                 <a:solidFill>
                   <a:srgbClr val="B83227"/>
                 </a:solidFill>
@@ -13583,49 +13503,9 @@
                 <a:ea typeface="Amiri" pitchFamily="2" charset="-78"/>
                 <a:cs typeface="Amiri" pitchFamily="2" charset="-78"/>
               </a:rPr>
-              <a:t>القِطَارُ يُغَادِرُ مِنَ الرَّصِيفِ رَقْمِ وَاحِدٍ</a:t>
-            </a:r>
-            <a:pPr algn="l" indent="0" marL="0">
-              <a:buNone/>
-            </a:pPr>
-            <a:r>
-              <a:rPr lang="en-US" sz="1750" dirty="0">
-                <a:solidFill>
-                  <a:srgbClr val="B83227"/>
-                </a:solidFill>
-                <a:latin typeface="Calibri" pitchFamily="34" charset="0"/>
-                <a:cs typeface="Amiri" pitchFamily="2" charset="-78"/>
-              </a:rPr>
-              <a:t>. (heard: </a:t>
-            </a:r>
-            <a:pPr algn="l" indent="0" marL="0">
-              <a:buNone/>
-            </a:pPr>
-            <a:r>
-              <a:rPr lang="ar-SA" altLang="en-US" sz="2300" dirty="0">
-                <a:solidFill>
-                  <a:srgbClr val="B83227"/>
-                </a:solidFill>
-                <a:latin typeface="Amiri" pitchFamily="2" charset="-78"/>
-                <a:ea typeface="Amiri" pitchFamily="2" charset="-78"/>
-                <a:cs typeface="Amiri" pitchFamily="2" charset="-78"/>
-              </a:rPr>
-              <a:t>لَيْسَ … بَلْ أَرْبَعَةٍ</a:t>
-            </a:r>
-            <a:pPr algn="l" indent="0" marL="0">
-              <a:buNone/>
-            </a:pPr>
-            <a:r>
-              <a:rPr lang="en-US" sz="1750" dirty="0">
-                <a:solidFill>
-                  <a:srgbClr val="B83227"/>
-                </a:solidFill>
-                <a:latin typeface="Calibri" pitchFamily="34" charset="0"/>
-                <a:cs typeface="Amiri" pitchFamily="2" charset="-78"/>
-              </a:rPr>
-              <a:t>)</a:t>
-            </a:r>
-            <a:endParaRPr lang="en-US" sz="1750" dirty="0"/>
+              <a:t>القِطَارُ يُغَادِرُ مِنَ الرَّصِيفِ رَقْمِ وَاحِدٍ.</a:t>
+            </a:r>
+            <a:endParaRPr lang="ar-SA" sz="1800" dirty="0"/>
           </a:p>
         </p:txBody>
       </p:sp>
